--- a/documentations/A-8.pptx
+++ b/documentations/A-8.pptx
@@ -4923,186 +4923,194 @@
         <p:spPr/>
         <p:txBody>
           <a:bodyPr>
-            <a:normAutofit lnSpcReduction="10000"/>
+            <a:noAutofit/>
           </a:bodyPr>
           <a:p>
-            <a:pPr marL="514350" indent="-514350">
+            <a:pPr marL="342900" indent="-342900" algn="just">
               <a:lnSpc>
                 <a:spcPct val="150000"/>
               </a:lnSpc>
               <a:buAutoNum type="arabicPeriod"/>
             </a:pPr>
             <a:r>
-              <a:rPr lang="en-US" altLang="en-US" sz="2200">
-                <a:latin typeface="Times New Roman" panose="02020603050405020304" pitchFamily="18" charset="0"/>
-                <a:cs typeface="Times New Roman" panose="02020603050405020304" pitchFamily="18" charset="0"/>
-              </a:rPr>
-              <a:t>Upload research paper in PDF format through the frontend interface</a:t>
-            </a:r>
-            <a:r>
-              <a:rPr lang="en-IN" altLang="en-US" sz="2200">
-                <a:latin typeface="Times New Roman" panose="02020603050405020304" pitchFamily="18" charset="0"/>
-                <a:cs typeface="Times New Roman" panose="02020603050405020304" pitchFamily="18" charset="0"/>
-              </a:rPr>
-              <a:t>.</a:t>
-            </a:r>
-            <a:endParaRPr lang="en-US" altLang="en-US" sz="2200">
-              <a:latin typeface="Times New Roman" panose="02020603050405020304" pitchFamily="18" charset="0"/>
-              <a:cs typeface="Times New Roman" panose="02020603050405020304" pitchFamily="18" charset="0"/>
-            </a:endParaRPr>
-          </a:p>
-          <a:p>
-            <a:pPr marL="514350" indent="-514350">
+              <a:rPr lang="en-US" altLang="en-US" sz="1500">
+                <a:latin typeface="Times New Roman" panose="02020603050405020304" pitchFamily="18" charset="0"/>
+                <a:cs typeface="Times New Roman" panose="02020603050405020304" pitchFamily="18" charset="0"/>
+              </a:rPr>
+              <a:t>Store generated embeddings in ChromaDB for efficient retrieval</a:t>
+            </a:r>
+            <a:endParaRPr lang="en-US" altLang="en-US" sz="1500">
+              <a:latin typeface="Times New Roman" panose="02020603050405020304" pitchFamily="18" charset="0"/>
+              <a:cs typeface="Times New Roman" panose="02020603050405020304" pitchFamily="18" charset="0"/>
+            </a:endParaRPr>
+          </a:p>
+          <a:p>
+            <a:pPr marL="342900" indent="-342900" algn="just">
               <a:lnSpc>
                 <a:spcPct val="150000"/>
               </a:lnSpc>
               <a:buAutoNum type="arabicPeriod"/>
             </a:pPr>
             <a:r>
-              <a:rPr lang="en-US" altLang="en-US" sz="2200">
-                <a:latin typeface="Times New Roman" panose="02020603050405020304" pitchFamily="18" charset="0"/>
-                <a:cs typeface="Times New Roman" panose="02020603050405020304" pitchFamily="18" charset="0"/>
-              </a:rPr>
-              <a:t>Extract raw textual content from the PDF using PyPDF2</a:t>
-            </a:r>
-            <a:r>
-              <a:rPr lang="en-IN" altLang="en-US" sz="2200">
-                <a:latin typeface="Times New Roman" panose="02020603050405020304" pitchFamily="18" charset="0"/>
-                <a:cs typeface="Times New Roman" panose="02020603050405020304" pitchFamily="18" charset="0"/>
-              </a:rPr>
-              <a:t>.</a:t>
-            </a:r>
-            <a:endParaRPr lang="en-US" altLang="en-US" sz="2200">
-              <a:latin typeface="Times New Roman" panose="02020603050405020304" pitchFamily="18" charset="0"/>
-              <a:cs typeface="Times New Roman" panose="02020603050405020304" pitchFamily="18" charset="0"/>
-            </a:endParaRPr>
-          </a:p>
-          <a:p>
-            <a:pPr marL="514350" indent="-514350">
+              <a:rPr lang="en-US" altLang="en-US" sz="1500">
+                <a:latin typeface="Times New Roman" panose="02020603050405020304" pitchFamily="18" charset="0"/>
+                <a:cs typeface="Times New Roman" panose="02020603050405020304" pitchFamily="18" charset="0"/>
+              </a:rPr>
+              <a:t>Accept user query related to the uploaded research paper</a:t>
+            </a:r>
+            <a:endParaRPr lang="en-US" altLang="en-US" sz="1500">
+              <a:latin typeface="Times New Roman" panose="02020603050405020304" pitchFamily="18" charset="0"/>
+              <a:cs typeface="Times New Roman" panose="02020603050405020304" pitchFamily="18" charset="0"/>
+            </a:endParaRPr>
+          </a:p>
+          <a:p>
+            <a:pPr marL="342900" indent="-342900" algn="just">
               <a:lnSpc>
                 <a:spcPct val="150000"/>
               </a:lnSpc>
               <a:buAutoNum type="arabicPeriod"/>
             </a:pPr>
             <a:r>
-              <a:rPr lang="en-US" altLang="en-US" sz="2200">
-                <a:latin typeface="Times New Roman" panose="02020603050405020304" pitchFamily="18" charset="0"/>
-                <a:cs typeface="Times New Roman" panose="02020603050405020304" pitchFamily="18" charset="0"/>
-              </a:rPr>
-              <a:t>Identify and refine logical sections using LLM-based processing</a:t>
-            </a:r>
-            <a:r>
-              <a:rPr lang="en-IN" altLang="en-US" sz="2200">
-                <a:latin typeface="Times New Roman" panose="02020603050405020304" pitchFamily="18" charset="0"/>
-                <a:cs typeface="Times New Roman" panose="02020603050405020304" pitchFamily="18" charset="0"/>
-              </a:rPr>
-              <a:t>.</a:t>
-            </a:r>
-            <a:endParaRPr lang="en-US" altLang="en-US" sz="2200">
-              <a:latin typeface="Times New Roman" panose="02020603050405020304" pitchFamily="18" charset="0"/>
-              <a:cs typeface="Times New Roman" panose="02020603050405020304" pitchFamily="18" charset="0"/>
-            </a:endParaRPr>
-          </a:p>
-          <a:p>
-            <a:pPr marL="514350" indent="-514350">
+              <a:rPr lang="en-US" altLang="en-US" sz="1500">
+                <a:latin typeface="Times New Roman" panose="02020603050405020304" pitchFamily="18" charset="0"/>
+                <a:cs typeface="Times New Roman" panose="02020603050405020304" pitchFamily="18" charset="0"/>
+              </a:rPr>
+              <a:t>Convert user query into embedding using the same embedding model</a:t>
+            </a:r>
+            <a:endParaRPr lang="en-US" altLang="en-US" sz="1500">
+              <a:latin typeface="Times New Roman" panose="02020603050405020304" pitchFamily="18" charset="0"/>
+              <a:cs typeface="Times New Roman" panose="02020603050405020304" pitchFamily="18" charset="0"/>
+            </a:endParaRPr>
+          </a:p>
+          <a:p>
+            <a:pPr marL="342900" indent="-342900" algn="just">
               <a:lnSpc>
                 <a:spcPct val="150000"/>
               </a:lnSpc>
               <a:buAutoNum type="arabicPeriod"/>
             </a:pPr>
             <a:r>
-              <a:rPr lang="en-US" altLang="en-US" sz="2200">
-                <a:latin typeface="Times New Roman" panose="02020603050405020304" pitchFamily="18" charset="0"/>
-                <a:cs typeface="Times New Roman" panose="02020603050405020304" pitchFamily="18" charset="0"/>
-              </a:rPr>
-              <a:t>Organize extracted content into structured section-wise data</a:t>
-            </a:r>
-            <a:r>
-              <a:rPr lang="en-IN" altLang="en-US" sz="2200">
-                <a:latin typeface="Times New Roman" panose="02020603050405020304" pitchFamily="18" charset="0"/>
-                <a:cs typeface="Times New Roman" panose="02020603050405020304" pitchFamily="18" charset="0"/>
-              </a:rPr>
-              <a:t>.</a:t>
-            </a:r>
-            <a:endParaRPr lang="en-US" altLang="en-US" sz="2200">
-              <a:latin typeface="Times New Roman" panose="02020603050405020304" pitchFamily="18" charset="0"/>
-              <a:cs typeface="Times New Roman" panose="02020603050405020304" pitchFamily="18" charset="0"/>
-            </a:endParaRPr>
-          </a:p>
-          <a:p>
-            <a:pPr marL="514350" indent="-514350">
+              <a:rPr lang="en-US" altLang="en-US" sz="1500">
+                <a:latin typeface="Times New Roman" panose="02020603050405020304" pitchFamily="18" charset="0"/>
+                <a:cs typeface="Times New Roman" panose="02020603050405020304" pitchFamily="18" charset="0"/>
+              </a:rPr>
+              <a:t>Compute cosine similarity between query and stored embeddings</a:t>
+            </a:r>
+            <a:endParaRPr lang="en-US" altLang="en-US" sz="1500">
+              <a:latin typeface="Times New Roman" panose="02020603050405020304" pitchFamily="18" charset="0"/>
+              <a:cs typeface="Times New Roman" panose="02020603050405020304" pitchFamily="18" charset="0"/>
+            </a:endParaRPr>
+          </a:p>
+          <a:p>
+            <a:pPr marL="342900" indent="-342900" algn="just">
               <a:lnSpc>
                 <a:spcPct val="150000"/>
               </a:lnSpc>
               <a:buAutoNum type="arabicPeriod"/>
             </a:pPr>
             <a:r>
-              <a:rPr lang="en-US" altLang="en-US" sz="2200">
-                <a:latin typeface="Times New Roman" panose="02020603050405020304" pitchFamily="18" charset="0"/>
-                <a:cs typeface="Times New Roman" panose="02020603050405020304" pitchFamily="18" charset="0"/>
-              </a:rPr>
-              <a:t>Perform semantic chunking with fixed size and overlap to preserve context</a:t>
-            </a:r>
-            <a:r>
-              <a:rPr lang="en-IN" altLang="en-US" sz="2200">
-                <a:latin typeface="Times New Roman" panose="02020603050405020304" pitchFamily="18" charset="0"/>
-                <a:cs typeface="Times New Roman" panose="02020603050405020304" pitchFamily="18" charset="0"/>
-              </a:rPr>
-              <a:t>.</a:t>
-            </a:r>
-            <a:endParaRPr lang="en-US" altLang="en-US" sz="2200">
-              <a:latin typeface="Times New Roman" panose="02020603050405020304" pitchFamily="18" charset="0"/>
-              <a:cs typeface="Times New Roman" panose="02020603050405020304" pitchFamily="18" charset="0"/>
-            </a:endParaRPr>
-          </a:p>
-          <a:p>
-            <a:pPr marL="514350" indent="-514350">
+              <a:rPr lang="en-US" altLang="en-US" sz="1500">
+                <a:latin typeface="Times New Roman" panose="02020603050405020304" pitchFamily="18" charset="0"/>
+                <a:cs typeface="Times New Roman" panose="02020603050405020304" pitchFamily="18" charset="0"/>
+              </a:rPr>
+              <a:t>Retrieve top-K most relevant chunks based on similarity scores</a:t>
+            </a:r>
+            <a:endParaRPr lang="en-US" altLang="en-US" sz="1500">
+              <a:latin typeface="Times New Roman" panose="02020603050405020304" pitchFamily="18" charset="0"/>
+              <a:cs typeface="Times New Roman" panose="02020603050405020304" pitchFamily="18" charset="0"/>
+            </a:endParaRPr>
+          </a:p>
+          <a:p>
+            <a:pPr marL="342900" indent="-342900" algn="just">
               <a:lnSpc>
                 <a:spcPct val="150000"/>
               </a:lnSpc>
               <a:buAutoNum type="arabicPeriod"/>
             </a:pPr>
             <a:r>
-              <a:rPr lang="en-US" altLang="en-US" sz="2200">
-                <a:latin typeface="Times New Roman" panose="02020603050405020304" pitchFamily="18" charset="0"/>
-                <a:cs typeface="Times New Roman" panose="02020603050405020304" pitchFamily="18" charset="0"/>
-              </a:rPr>
-              <a:t>Convert each chunk into dense vector embeddings using all-MiniLM-L6-v2 model</a:t>
-            </a:r>
-            <a:r>
-              <a:rPr lang="en-IN" altLang="en-US" sz="2200">
-                <a:latin typeface="Times New Roman" panose="02020603050405020304" pitchFamily="18" charset="0"/>
-                <a:cs typeface="Times New Roman" panose="02020603050405020304" pitchFamily="18" charset="0"/>
-              </a:rPr>
-              <a:t>.</a:t>
-            </a:r>
-            <a:endParaRPr lang="en-US" altLang="en-US" sz="2200">
-              <a:latin typeface="Times New Roman" panose="02020603050405020304" pitchFamily="18" charset="0"/>
-              <a:cs typeface="Times New Roman" panose="02020603050405020304" pitchFamily="18" charset="0"/>
-            </a:endParaRPr>
-          </a:p>
-          <a:p>
-            <a:pPr marL="514350" indent="-514350">
+              <a:rPr lang="en-US" altLang="en-US" sz="1500">
+                <a:latin typeface="Times New Roman" panose="02020603050405020304" pitchFamily="18" charset="0"/>
+                <a:cs typeface="Times New Roman" panose="02020603050405020304" pitchFamily="18" charset="0"/>
+              </a:rPr>
+              <a:t>Construct a structured prompt combining query and retrieved context</a:t>
+            </a:r>
+            <a:endParaRPr lang="en-US" altLang="en-US" sz="1500">
+              <a:latin typeface="Times New Roman" panose="02020603050405020304" pitchFamily="18" charset="0"/>
+              <a:cs typeface="Times New Roman" panose="02020603050405020304" pitchFamily="18" charset="0"/>
+            </a:endParaRPr>
+          </a:p>
+          <a:p>
+            <a:pPr marL="342900" indent="-342900" algn="just">
               <a:lnSpc>
                 <a:spcPct val="150000"/>
               </a:lnSpc>
               <a:buAutoNum type="arabicPeriod"/>
             </a:pPr>
             <a:r>
-              <a:rPr lang="en-US" altLang="en-US" sz="2200">
-                <a:latin typeface="Times New Roman" panose="02020603050405020304" pitchFamily="18" charset="0"/>
-                <a:cs typeface="Times New Roman" panose="02020603050405020304" pitchFamily="18" charset="0"/>
-              </a:rPr>
-              <a:t>Prepare embedding data for storage in vector database</a:t>
-            </a:r>
-            <a:r>
-              <a:rPr lang="en-IN" altLang="en-US" sz="2200">
-                <a:latin typeface="Times New Roman" panose="02020603050405020304" pitchFamily="18" charset="0"/>
-                <a:cs typeface="Times New Roman" panose="02020603050405020304" pitchFamily="18" charset="0"/>
-              </a:rPr>
-              <a:t>.</a:t>
-            </a:r>
-            <a:endParaRPr lang="en-IN" altLang="en-US" sz="2200">
+              <a:rPr lang="en-US" altLang="en-US" sz="1500">
+                <a:latin typeface="Times New Roman" panose="02020603050405020304" pitchFamily="18" charset="0"/>
+                <a:cs typeface="Times New Roman" panose="02020603050405020304" pitchFamily="18" charset="0"/>
+              </a:rPr>
+              <a:t>Generate response using Llama 3.3 via Groq API</a:t>
+            </a:r>
+            <a:endParaRPr lang="en-US" altLang="en-US" sz="1500">
+              <a:latin typeface="Times New Roman" panose="02020603050405020304" pitchFamily="18" charset="0"/>
+              <a:cs typeface="Times New Roman" panose="02020603050405020304" pitchFamily="18" charset="0"/>
+            </a:endParaRPr>
+          </a:p>
+          <a:p>
+            <a:pPr marL="342900" indent="-342900" algn="just">
+              <a:lnSpc>
+                <a:spcPct val="150000"/>
+              </a:lnSpc>
+              <a:buAutoNum type="arabicPeriod"/>
+            </a:pPr>
+            <a:r>
+              <a:rPr lang="en-US" altLang="en-US" sz="1500">
+                <a:latin typeface="Times New Roman" panose="02020603050405020304" pitchFamily="18" charset="0"/>
+                <a:cs typeface="Times New Roman" panose="02020603050405020304" pitchFamily="18" charset="0"/>
+              </a:rPr>
+              <a:t>Attach source references corresponding to retrieved chunks</a:t>
+            </a:r>
+            <a:endParaRPr lang="en-US" altLang="en-US" sz="1500">
+              <a:latin typeface="Times New Roman" panose="02020603050405020304" pitchFamily="18" charset="0"/>
+              <a:cs typeface="Times New Roman" panose="02020603050405020304" pitchFamily="18" charset="0"/>
+            </a:endParaRPr>
+          </a:p>
+          <a:p>
+            <a:pPr marL="342900" indent="-342900" algn="just">
+              <a:lnSpc>
+                <a:spcPct val="150000"/>
+              </a:lnSpc>
+              <a:buAutoNum type="arabicPeriod"/>
+            </a:pPr>
+            <a:r>
+              <a:rPr lang="en-US" altLang="en-US" sz="1500">
+                <a:latin typeface="Times New Roman" panose="02020603050405020304" pitchFamily="18" charset="0"/>
+                <a:cs typeface="Times New Roman" panose="02020603050405020304" pitchFamily="18" charset="0"/>
+              </a:rPr>
+              <a:t>Evaluate response quality using BERTScore, ROUGE, and LLM-as-a-Judge metrics</a:t>
+            </a:r>
+            <a:endParaRPr lang="en-US" altLang="en-US" sz="1500">
+              <a:latin typeface="Times New Roman" panose="02020603050405020304" pitchFamily="18" charset="0"/>
+              <a:cs typeface="Times New Roman" panose="02020603050405020304" pitchFamily="18" charset="0"/>
+            </a:endParaRPr>
+          </a:p>
+          <a:p>
+            <a:pPr marL="342900" indent="-342900" algn="just">
+              <a:lnSpc>
+                <a:spcPct val="150000"/>
+              </a:lnSpc>
+              <a:buAutoNum type="arabicPeriod"/>
+            </a:pPr>
+            <a:r>
+              <a:rPr lang="en-US" altLang="en-US" sz="1500">
+                <a:latin typeface="Times New Roman" panose="02020603050405020304" pitchFamily="18" charset="0"/>
+                <a:cs typeface="Times New Roman" panose="02020603050405020304" pitchFamily="18" charset="0"/>
+              </a:rPr>
+              <a:t>Return final grounded and concise response to the user</a:t>
+            </a:r>
+            <a:endParaRPr lang="en-US" altLang="en-US" sz="1500">
               <a:latin typeface="Times New Roman" panose="02020603050405020304" pitchFamily="18" charset="0"/>
               <a:cs typeface="Times New Roman" panose="02020603050405020304" pitchFamily="18" charset="0"/>
             </a:endParaRPr>
@@ -6436,7 +6444,7 @@
               <a:t>[2] H. Tekgöz, H. Erdo</a:t>
             </a:r>
             <a:r>
-              <a:rPr lang="" altLang="en-US">
+              <a:rPr lang="en-US" altLang="en-US">
                 <a:latin typeface="Times New Roman" panose="02020603050405020304" pitchFamily="18" charset="0"/>
                 <a:cs typeface="Times New Roman" panose="02020603050405020304" pitchFamily="18" charset="0"/>
               </a:rPr>
@@ -6450,7 +6458,7 @@
               <a:t>an, H. Uz and H. Alt</a:t>
             </a:r>
             <a:r>
-              <a:rPr lang="" altLang="en-US">
+              <a:rPr lang="en-US" altLang="en-US">
                 <a:latin typeface="Times New Roman" panose="02020603050405020304" pitchFamily="18" charset="0"/>
                 <a:cs typeface="Times New Roman" panose="02020603050405020304" pitchFamily="18" charset="0"/>
               </a:rPr>

--- a/documentations/A-8.pptx
+++ b/documentations/A-8.pptx
@@ -4937,7 +4937,7 @@
                 <a:latin typeface="Times New Roman" panose="02020603050405020304" pitchFamily="18" charset="0"/>
                 <a:cs typeface="Times New Roman" panose="02020603050405020304" pitchFamily="18" charset="0"/>
               </a:rPr>
-              <a:t>Store generated embeddings in ChromaDB for efficient retrieval</a:t>
+              <a:t>Store generated embeddings in FAISS DB for efficient retrieval</a:t>
             </a:r>
             <a:endParaRPr lang="en-US" altLang="en-US" sz="1500">
               <a:latin typeface="Times New Roman" panose="02020603050405020304" pitchFamily="18" charset="0"/>
@@ -8183,7 +8183,7 @@
                 <a:latin typeface="Times New Roman" panose="02020603050405020304" pitchFamily="18" charset="0"/>
                 <a:cs typeface="Times New Roman" panose="02020603050405020304" pitchFamily="18" charset="0"/>
               </a:rPr>
-              <a:t>Vector Database: ChromaDB (efficient storage and retrieval)</a:t>
+              <a:t>Vector Database: FAISS (efficient storage and retrieval)</a:t>
             </a:r>
             <a:endParaRPr lang="en-US" altLang="en-US" sz="6400">
               <a:latin typeface="Times New Roman" panose="02020603050405020304" pitchFamily="18" charset="0"/>
